--- a/DIY Project-Car Market Trends Analysis with Car Dekho Data/DIY Project PPT.pptx
+++ b/DIY Project-Car Market Trends Analysis with Car Dekho Data/DIY Project PPT.pptx
@@ -258,7 +258,7 @@
           <a:p>
             <a:fld id="{EF1077DB-935E-4A0A-947A-D283B9F9F452}" type="datetimeFigureOut">
               <a:rPr lang="en-US" smtClean="0"/>
-              <a:t>8/30/2026</a:t>
+              <a:t>9/3/2026</a:t>
             </a:fld>
             <a:endParaRPr lang="en-US" dirty="0"/>
           </a:p>
@@ -435,7 +435,7 @@
           <a:p>
             <a:fld id="{2D9EC30E-1A71-4188-9BE7-E2A64929A436}" type="datetimeFigureOut">
               <a:rPr lang="en-US" noProof="0" smtClean="0"/>
-              <a:t>8/30/2026</a:t>
+              <a:t>9/3/2026</a:t>
             </a:fld>
             <a:endParaRPr lang="en-US" noProof="0" dirty="0"/>
           </a:p>
@@ -1532,7 +1532,7 @@
             <a:fld id="{B61BEF0D-F0BB-DE4B-95CE-6DB70DBA9567}" type="datetimeFigureOut">
               <a:rPr lang="en-US" smtClean="0"/>
               <a:pPr/>
-              <a:t>8/30/2026</a:t>
+              <a:t>9/3/2026</a:t>
             </a:fld>
             <a:endParaRPr lang="en-US" dirty="0"/>
           </a:p>
@@ -1786,7 +1786,7 @@
             <a:fld id="{B61BEF0D-F0BB-DE4B-95CE-6DB70DBA9567}" type="datetimeFigureOut">
               <a:rPr lang="en-US" smtClean="0"/>
               <a:pPr/>
-              <a:t>8/30/2026</a:t>
+              <a:t>9/3/2026</a:t>
             </a:fld>
             <a:endParaRPr lang="en-US" dirty="0"/>
           </a:p>
@@ -2103,7 +2103,7 @@
             <a:fld id="{B61BEF0D-F0BB-DE4B-95CE-6DB70DBA9567}" type="datetimeFigureOut">
               <a:rPr lang="en-US" smtClean="0"/>
               <a:pPr/>
-              <a:t>8/30/2026</a:t>
+              <a:t>9/3/2026</a:t>
             </a:fld>
             <a:endParaRPr lang="en-US" dirty="0"/>
           </a:p>
@@ -2439,7 +2439,7 @@
             <a:fld id="{B61BEF0D-F0BB-DE4B-95CE-6DB70DBA9567}" type="datetimeFigureOut">
               <a:rPr lang="en-US" smtClean="0"/>
               <a:pPr/>
-              <a:t>8/30/2026</a:t>
+              <a:t>9/3/2026</a:t>
             </a:fld>
             <a:endParaRPr lang="en-US" dirty="0"/>
           </a:p>
@@ -2756,7 +2756,7 @@
             <a:fld id="{B61BEF0D-F0BB-DE4B-95CE-6DB70DBA9567}" type="datetimeFigureOut">
               <a:rPr lang="en-US" smtClean="0"/>
               <a:pPr/>
-              <a:t>8/30/2026</a:t>
+              <a:t>9/3/2026</a:t>
             </a:fld>
             <a:endParaRPr lang="en-US" dirty="0"/>
           </a:p>
@@ -3152,7 +3152,7 @@
             <a:fld id="{B61BEF0D-F0BB-DE4B-95CE-6DB70DBA9567}" type="datetimeFigureOut">
               <a:rPr lang="en-US" smtClean="0"/>
               <a:pPr/>
-              <a:t>8/30/2026</a:t>
+              <a:t>9/3/2026</a:t>
             </a:fld>
             <a:endParaRPr lang="en-US" dirty="0"/>
           </a:p>
@@ -3324,7 +3324,7 @@
           <a:p>
             <a:fld id="{55C6B4A9-1611-4792-9094-5F34BCA07E0B}" type="datetimeFigureOut">
               <a:rPr lang="en-US" smtClean="0"/>
-              <a:t>8/30/2026</a:t>
+              <a:t>9/3/2026</a:t>
             </a:fld>
             <a:endParaRPr lang="en-US" dirty="0"/>
           </a:p>
@@ -3506,7 +3506,7 @@
             <a:fld id="{B61BEF0D-F0BB-DE4B-95CE-6DB70DBA9567}" type="datetimeFigureOut">
               <a:rPr lang="en-US" smtClean="0"/>
               <a:pPr/>
-              <a:t>8/30/2026</a:t>
+              <a:t>9/3/2026</a:t>
             </a:fld>
             <a:endParaRPr lang="en-US" dirty="0"/>
           </a:p>
@@ -5235,7 +5235,7 @@
             <a:fld id="{B61BEF0D-F0BB-DE4B-95CE-6DB70DBA9567}" type="datetimeFigureOut">
               <a:rPr lang="en-US" smtClean="0"/>
               <a:pPr/>
-              <a:t>8/30/2026</a:t>
+              <a:t>9/3/2026</a:t>
             </a:fld>
             <a:endParaRPr lang="en-US" dirty="0"/>
           </a:p>
@@ -6970,7 +6970,7 @@
             <a:fld id="{B61BEF0D-F0BB-DE4B-95CE-6DB70DBA9567}" type="datetimeFigureOut">
               <a:rPr lang="en-US" smtClean="0"/>
               <a:pPr/>
-              <a:t>8/30/2026</a:t>
+              <a:t>9/3/2026</a:t>
             </a:fld>
             <a:endParaRPr lang="en-US" dirty="0"/>
           </a:p>
@@ -7204,7 +7204,7 @@
           <a:p>
             <a:fld id="{EB712588-04B1-427B-82EE-E8DB90309F08}" type="datetimeFigureOut">
               <a:rPr lang="en-US" smtClean="0"/>
-              <a:t>8/30/2026</a:t>
+              <a:t>9/3/2026</a:t>
             </a:fld>
             <a:endParaRPr lang="en-US" dirty="0"/>
           </a:p>
@@ -7580,7 +7580,7 @@
             <a:fld id="{B61BEF0D-F0BB-DE4B-95CE-6DB70DBA9567}" type="datetimeFigureOut">
               <a:rPr lang="en-US" smtClean="0"/>
               <a:pPr/>
-              <a:t>8/30/2026</a:t>
+              <a:t>9/3/2026</a:t>
             </a:fld>
             <a:endParaRPr lang="en-US" dirty="0"/>
           </a:p>
@@ -7706,7 +7706,7 @@
             <a:fld id="{B61BEF0D-F0BB-DE4B-95CE-6DB70DBA9567}" type="datetimeFigureOut">
               <a:rPr lang="en-US" smtClean="0"/>
               <a:pPr/>
-              <a:t>8/30/2026</a:t>
+              <a:t>9/3/2026</a:t>
             </a:fld>
             <a:endParaRPr lang="en-US" dirty="0"/>
           </a:p>
@@ -7804,7 +7804,7 @@
             <a:fld id="{B61BEF0D-F0BB-DE4B-95CE-6DB70DBA9567}" type="datetimeFigureOut">
               <a:rPr lang="en-US" smtClean="0"/>
               <a:pPr/>
-              <a:t>8/30/2026</a:t>
+              <a:t>9/3/2026</a:t>
             </a:fld>
             <a:endParaRPr lang="en-US" dirty="0"/>
           </a:p>
@@ -8061,7 +8061,7 @@
           <a:p>
             <a:fld id="{42A54C80-263E-416B-A8E0-580EDEADCBDC}" type="datetimeFigureOut">
               <a:rPr lang="en-US" smtClean="0"/>
-              <a:t>8/30/2026</a:t>
+              <a:t>9/3/2026</a:t>
             </a:fld>
             <a:endParaRPr lang="en-US" dirty="0"/>
           </a:p>
@@ -8369,7 +8369,7 @@
             <a:fld id="{B61BEF0D-F0BB-DE4B-95CE-6DB70DBA9567}" type="datetimeFigureOut">
               <a:rPr lang="en-US" smtClean="0"/>
               <a:pPr/>
-              <a:t>8/30/2026</a:t>
+              <a:t>9/3/2026</a:t>
             </a:fld>
             <a:endParaRPr lang="en-US" dirty="0"/>
           </a:p>
@@ -9073,7 +9073,7 @@
             <a:fld id="{B61BEF0D-F0BB-DE4B-95CE-6DB70DBA9567}" type="datetimeFigureOut">
               <a:rPr lang="en-US" smtClean="0"/>
               <a:pPr/>
-              <a:t>8/30/2026</a:t>
+              <a:t>9/3/2026</a:t>
             </a:fld>
             <a:endParaRPr lang="en-US" dirty="0"/>
           </a:p>
@@ -9284,7 +9284,7 @@
                 </a:solidFill>
               </a:rPr>
               <a:pPr/>
-              <a:t>8/30/2026</a:t>
+              <a:t>9/3/2026</a:t>
             </a:fld>
             <a:endParaRPr lang="en-US" sz="1100" dirty="0">
               <a:solidFill>
@@ -20914,7 +20914,7 @@
                 <a:solidFill>
                   <a:srgbClr val="0070C0"/>
                 </a:solidFill>
-                <a:hlinkClick r:id="rId3" action="ppaction://hlinkfile"/>
+                <a:hlinkClick r:id="rId3"/>
               </a:rPr>
               <a:t>Github Link</a:t>
             </a:r>
@@ -22140,15 +22140,6 @@
 </file>
 
 <file path=customXml/item1.xml><?xml version="1.0" encoding="utf-8"?>
-<?mso-contentType ?>
-<FormTemplates xmlns="http://schemas.microsoft.com/sharepoint/v3/contenttype/forms">
-  <Display>DocumentLibraryForm</Display>
-  <Edit>DocumentLibraryForm</Edit>
-  <New>DocumentLibraryForm</New>
-</FormTemplates>
-</file>
-
-<file path=customXml/item2.xml><?xml version="1.0" encoding="utf-8"?>
 <ct:contentTypeSchema xmlns:ct="http://schemas.microsoft.com/office/2006/metadata/contentType" xmlns:ma="http://schemas.microsoft.com/office/2006/metadata/properties/metaAttributes" ct:_="" ma:_="" ma:contentTypeName="Document" ma:contentTypeID="0x01010079F111ED35F8CC479449609E8A0923A6" ma:contentTypeVersion="12" ma:contentTypeDescription="Create a new document." ma:contentTypeScope="" ma:versionID="426e97fa315356fffbdcd9876fe988c2">
   <xsd:schema xmlns:xsd="http://www.w3.org/2001/XMLSchema" xmlns:xs="http://www.w3.org/2001/XMLSchema" xmlns:p="http://schemas.microsoft.com/office/2006/metadata/properties" xmlns:ns2="71af3243-3dd4-4a8d-8c0d-dd76da1f02a5" xmlns:ns3="16c05727-aa75-4e4a-9b5f-8a80a1165891" targetNamespace="http://schemas.microsoft.com/office/2006/metadata/properties" ma:root="true" ma:fieldsID="14b8f0def80e6d70ce3def20c90759ae" ns2:_="" ns3:_="">
     <xsd:import namespace="71af3243-3dd4-4a8d-8c0d-dd76da1f02a5"/>
@@ -22369,6 +22360,15 @@
 </ct:contentTypeSchema>
 </file>
 
+<file path=customXml/item2.xml><?xml version="1.0" encoding="utf-8"?>
+<?mso-contentType ?>
+<FormTemplates xmlns="http://schemas.microsoft.com/sharepoint/v3/contenttype/forms">
+  <Display>DocumentLibraryForm</Display>
+  <Edit>DocumentLibraryForm</Edit>
+  <New>DocumentLibraryForm</New>
+</FormTemplates>
+</file>
+
 <file path=customXml/item3.xml><?xml version="1.0" encoding="utf-8"?>
 <p:properties xmlns:p="http://schemas.microsoft.com/office/2006/metadata/properties" xmlns:xsi="http://www.w3.org/2001/XMLSchema-instance" xmlns:pc="http://schemas.microsoft.com/office/infopath/2007/PartnerControls">
   <documentManagement>
@@ -22379,14 +22379,6 @@
 </file>
 
 <file path=customXml/itemProps1.xml><?xml version="1.0" encoding="utf-8"?>
-<ds:datastoreItem xmlns:ds="http://schemas.openxmlformats.org/officeDocument/2006/customXml" ds:itemID="{05D99ABA-76CE-4A8E-B5F0-C051B96628DE}">
-  <ds:schemaRefs>
-    <ds:schemaRef ds:uri="http://schemas.microsoft.com/sharepoint/v3/contenttype/forms"/>
-  </ds:schemaRefs>
-</ds:datastoreItem>
-</file>
-
-<file path=customXml/itemProps2.xml><?xml version="1.0" encoding="utf-8"?>
 <ds:datastoreItem xmlns:ds="http://schemas.openxmlformats.org/officeDocument/2006/customXml" ds:itemID="{B19EB750-A6DA-4BE8-B87B-FC499FE73360}">
   <ds:schemaRefs>
     <ds:schemaRef ds:uri="http://schemas.microsoft.com/office/2006/metadata/contentType"/>
@@ -22401,6 +22393,14 @@
     <ds:schemaRef ds:uri="http://purl.org/dc/elements/1.1/"/>
     <ds:schemaRef ds:uri="http://purl.org/dc/terms/"/>
     <ds:schemaRef ds:uri="http://schemas.microsoft.com/internal/obd"/>
+  </ds:schemaRefs>
+</ds:datastoreItem>
+</file>
+
+<file path=customXml/itemProps2.xml><?xml version="1.0" encoding="utf-8"?>
+<ds:datastoreItem xmlns:ds="http://schemas.openxmlformats.org/officeDocument/2006/customXml" ds:itemID="{05D99ABA-76CE-4A8E-B5F0-C051B96628DE}">
+  <ds:schemaRefs>
+    <ds:schemaRef ds:uri="http://schemas.microsoft.com/sharepoint/v3/contenttype/forms"/>
   </ds:schemaRefs>
 </ds:datastoreItem>
 </file>
